--- a/docs/Lessons/Lesson 14 - Raising the Stakes/Lesson_14_Slides.pptx
+++ b/docs/Lessons/Lesson 14 - Raising the Stakes/Lesson_14_Slides.pptx
@@ -143,6 +143,230 @@
           <a:chExt cx="0" cy="0"/>
         </a:xfrm>
       </p:grpSpPr>
+      <p:sp>
+        <p:nvSpPr>
+          <p:cNvPr id="2" name="Header Placeholder 1"/>
+          <p:cNvSpPr>
+            <a:spLocks noGrp="1"/>
+          </p:cNvSpPr>
+          <p:nvPr>
+            <p:ph type="hdr" sz="quarter"/>
+          </p:nvPr>
+        </p:nvSpPr>
+        <p:spPr>
+          <a:xfrm>
+            <a:off x="0" y="0"/>
+            <a:ext cx="2971800" cy="458788"/>
+          </a:xfrm>
+          <a:prstGeom prst="rect">
+            <a:avLst/>
+          </a:prstGeom>
+        </p:spPr>
+        <p:txBody>
+          <a:bodyPr vert="horz" lIns="91440" tIns="45720" rIns="91440" bIns="45720" rtlCol="0"/>
+          <a:lstStyle>
+            <a:lvl1pPr algn="l">
+              <a:defRPr sz="1200"/>
+            </a:lvl1pPr>
+          </a:lstStyle>
+          <a:p>
+            <a:endParaRPr lang="en-US"/>
+          </a:p>
+        </p:txBody>
+      </p:sp>
+      <p:sp>
+        <p:nvSpPr>
+          <p:cNvPr id="3" name="Date Placeholder 2"/>
+          <p:cNvSpPr>
+            <a:spLocks noGrp="1"/>
+          </p:cNvSpPr>
+          <p:nvPr>
+            <p:ph type="dt" idx="1"/>
+          </p:nvPr>
+        </p:nvSpPr>
+        <p:spPr>
+          <a:xfrm>
+            <a:off x="3884613" y="0"/>
+            <a:ext cx="2971800" cy="458788"/>
+          </a:xfrm>
+          <a:prstGeom prst="rect">
+            <a:avLst/>
+          </a:prstGeom>
+        </p:spPr>
+        <p:txBody>
+          <a:bodyPr vert="horz" lIns="91440" tIns="45720" rIns="91440" bIns="45720" rtlCol="0"/>
+          <a:lstStyle>
+            <a:lvl1pPr algn="r">
+              <a:defRPr sz="1200"/>
+            </a:lvl1pPr>
+          </a:lstStyle>
+          <a:p>
+            <a:fld id="{5282F153-3F37-0F45-9E97-73ACFA13230C}" type="datetimeFigureOut">
+              <a:rPr lang="en-US"/>
+              <a:t>7/23/19</a:t>
+            </a:fld>
+            <a:endParaRPr lang="en-US"/>
+          </a:p>
+        </p:txBody>
+      </p:sp>
+      <p:sp>
+        <p:nvSpPr>
+          <p:cNvPr id="4" name="Slide Image Placeholder 3"/>
+          <p:cNvSpPr>
+            <a:spLocks noGrp="1" noRot="1" noChangeAspect="1"/>
+          </p:cNvSpPr>
+          <p:nvPr>
+            <p:ph type="sldImg" idx="2"/>
+          </p:nvPr>
+        </p:nvSpPr>
+        <p:spPr>
+          <a:xfrm>
+            <a:off x="685800" y="1143000"/>
+            <a:ext cx="5486400" cy="3086100"/>
+          </a:xfrm>
+          <a:prstGeom prst="rect">
+            <a:avLst/>
+          </a:prstGeom>
+          <a:noFill/>
+          <a:ln w="12700">
+            <a:solidFill>
+              <a:prstClr val="black"/>
+            </a:solidFill>
+          </a:ln>
+        </p:spPr>
+        <p:txBody>
+          <a:bodyPr vert="horz" lIns="91440" tIns="45720" rIns="91440" bIns="45720" rtlCol="0" anchor="ctr"/>
+          <a:lstStyle/>
+          <a:p>
+            <a:endParaRPr lang="en-US"/>
+          </a:p>
+        </p:txBody>
+      </p:sp>
+      <p:sp>
+        <p:nvSpPr>
+          <p:cNvPr id="5" name="Notes Placeholder 4"/>
+          <p:cNvSpPr>
+            <a:spLocks noGrp="1"/>
+          </p:cNvSpPr>
+          <p:nvPr>
+            <p:ph type="body" sz="quarter" idx="3"/>
+          </p:nvPr>
+        </p:nvSpPr>
+        <p:spPr>
+          <a:xfrm>
+            <a:off x="685800" y="4400550"/>
+            <a:ext cx="5486400" cy="3600450"/>
+          </a:xfrm>
+          <a:prstGeom prst="rect">
+            <a:avLst/>
+          </a:prstGeom>
+        </p:spPr>
+        <p:txBody>
+          <a:bodyPr vert="horz" lIns="91440" tIns="45720" rIns="91440" bIns="45720" rtlCol="0"/>
+          <a:lstStyle/>
+          <a:p>
+            <a:pPr lvl="0"/>
+            <a:r>
+              <a:rPr lang="en-US"/>
+              <a:t>Click to edit Master text styles</a:t>
+            </a:r>
+          </a:p>
+          <a:p>
+            <a:pPr lvl="1"/>
+            <a:r>
+              <a:rPr lang="en-US"/>
+              <a:t>Second level</a:t>
+            </a:r>
+          </a:p>
+          <a:p>
+            <a:pPr lvl="2"/>
+            <a:r>
+              <a:rPr lang="en-US"/>
+              <a:t>Third level</a:t>
+            </a:r>
+          </a:p>
+          <a:p>
+            <a:pPr lvl="3"/>
+            <a:r>
+              <a:rPr lang="en-US"/>
+              <a:t>Fourth level</a:t>
+            </a:r>
+          </a:p>
+          <a:p>
+            <a:pPr lvl="4"/>
+            <a:r>
+              <a:rPr lang="en-US"/>
+              <a:t>Fifth level</a:t>
+            </a:r>
+          </a:p>
+        </p:txBody>
+      </p:sp>
+      <p:sp>
+        <p:nvSpPr>
+          <p:cNvPr id="6" name="Footer Placeholder 5"/>
+          <p:cNvSpPr>
+            <a:spLocks noGrp="1"/>
+          </p:cNvSpPr>
+          <p:nvPr>
+            <p:ph type="ftr" sz="quarter" idx="4"/>
+          </p:nvPr>
+        </p:nvSpPr>
+        <p:spPr>
+          <a:xfrm>
+            <a:off x="0" y="8685213"/>
+            <a:ext cx="2971800" cy="458787"/>
+          </a:xfrm>
+          <a:prstGeom prst="rect">
+            <a:avLst/>
+          </a:prstGeom>
+        </p:spPr>
+        <p:txBody>
+          <a:bodyPr vert="horz" lIns="91440" tIns="45720" rIns="91440" bIns="45720" rtlCol="0" anchor="b"/>
+          <a:lstStyle>
+            <a:lvl1pPr algn="l">
+              <a:defRPr sz="1200"/>
+            </a:lvl1pPr>
+          </a:lstStyle>
+          <a:p>
+            <a:endParaRPr lang="en-US"/>
+          </a:p>
+        </p:txBody>
+      </p:sp>
+      <p:sp>
+        <p:nvSpPr>
+          <p:cNvPr id="7" name="Slide Number Placeholder 6"/>
+          <p:cNvSpPr>
+            <a:spLocks noGrp="1"/>
+          </p:cNvSpPr>
+          <p:nvPr>
+            <p:ph type="sldNum" sz="quarter" idx="5"/>
+          </p:nvPr>
+        </p:nvSpPr>
+        <p:spPr>
+          <a:xfrm>
+            <a:off x="3884613" y="8685213"/>
+            <a:ext cx="2971800" cy="458787"/>
+          </a:xfrm>
+          <a:prstGeom prst="rect">
+            <a:avLst/>
+          </a:prstGeom>
+        </p:spPr>
+        <p:txBody>
+          <a:bodyPr vert="horz" lIns="91440" tIns="45720" rIns="91440" bIns="45720" rtlCol="0" anchor="b"/>
+          <a:lstStyle>
+            <a:lvl1pPr algn="r">
+              <a:defRPr sz="1200"/>
+            </a:lvl1pPr>
+          </a:lstStyle>
+          <a:p>
+            <a:fld id="{CE5E9CC1-C706-0F49-92D6-E571CC5EEA8F}" type="slidenum">
+              <a:rPr lang="en-US"/>
+              <a:t>‹#›</a:t>
+            </a:fld>
+            <a:endParaRPr lang="en-US"/>
+          </a:p>
+        </p:txBody>
+      </p:sp>
     </p:spTree>
     <p:extLst>
       <p:ext uri="{BB962C8B-B14F-4D97-AF65-F5344CB8AC3E}">
@@ -468,7 +692,7 @@
           <a:p>
             <a:r>
               <a:rPr lang="en-US" dirty="0"/>
-              <a:t/>
+              <a:t>"Level 3 works differently this week. Instead of 2-3 small stretch ideas, you're choosing ONE feature from a list of five real capstone-level ideas: destructible shields, a power-up, a bonus enemy, formation movement, or a title/game-over screen." "These are open-ended on purpose. A good-faith attempt at the general idea - even if it's rough - is a complete Level 3 finish today. Don't feel like you need to polish it. Pick whichever one sounds the most fun to YOU." [Timing checkpoint: wrap by 0:45]</a:t>
             </a:r>
             <a:endParaRPr lang="en-US" dirty="0"/>
           </a:p>
@@ -644,7 +868,7 @@
           <a:p>
             <a:r>
               <a:rPr lang="en-US" dirty="0"/>
-              <a:t/>
+              <a:t>"For lab today, open your own project from last week - not a new one. No new assets needed, except 001 Game Creator folks, who are adding two more pre-placed enemy copies in the Map editor first." [Hand out engine-specific handouts] "Level 1 and 2 today, then pick your Level 3 feature. Test a full 3-wave round when you're done, and confirm restarting brings everything back to wave 1's original feel." "Questions before we start lab? ... Let's raise the stakes."</a:t>
             </a:r>
             <a:endParaRPr lang="en-US" dirty="0"/>
           </a:p>
@@ -1172,7 +1396,7 @@
           <a:p>
             <a:r>
               <a:rPr lang="en-US" dirty="0"/>
-              <a:t/>
+              <a:t>"Welcome back! Your game moves, shoots, sounds good, and reacts to hits. Today, it starts to feel like a REAL arcade game - one that gets harder the longer you survive." "Some of you may remember a hint from Lesson 11's Teacher's Key, or a comment in the TIC-80 or Scratch materials, that hard-coding 5 enemies per wave was 'a deliberate simplification.' Today's the day that pays off."</a:t>
             </a:r>
             <a:endParaRPr lang="en-US" dirty="0"/>
           </a:p>
@@ -1348,7 +1572,7 @@
           <a:p>
             <a:r>
               <a:rPr lang="en-US" dirty="0"/>
-              <a:t/>
+              <a:t>"Here's the whole idea in one sentence: instead of always spawning 5 enemies, we spawn (4 + wave) enemies. Wave 1: still 5. Wave 2: 6. Wave 3: 7. One small formula, and your game already escalates." "The catch: that formula has to appear in TWO places that already exist in your code - wherever you spawn enemies, AND wherever enemies_remaining gets reset for a new wave. If those two disagree, your win-check breaks. This is exactly the kind of 'one source of truth' thinking we've been building since Lesson 10's reusable reset function." [Timing checkpoint: wrap by 0:15]</a:t>
             </a:r>
             <a:endParaRPr lang="en-US" dirty="0"/>
           </a:p>
@@ -1524,7 +1748,7 @@
           <a:p>
             <a:r>
               <a:rPr lang="en-US" dirty="0"/>
-              <a:t/>
+              <a:t>[Demo cue: switch to GameMaker, open a project with Lesson 13's flash and explosion working] "Count alone is a good start, but speed makes it feel dangerous. Watch: in spawn_enemies(), right after instance_create_layer() makes each enemy, I set inst.enemy_speed = 1 + (wave - 1) * 0.5. Wave 1 stays exactly the same. Wave 3 is noticeably faster." [Build it live, demonstrate wave 1 versus wave 3 side by side if time allows] "That new enemy_speed variable has to actually get used, so flip over to obj_enemy's Step event: it currently just says y += 1. Change that one line to y += enemy_speed, and suddenly the number we set at spawn time is doing real work every frame. Notice what did NOT change: the rest of the Step event, from Lesson 4. It already ran every frame - today we just made one of its numbers depend on the wave." "TIC-80 folks: your engine doesn't have a per-instance speed variable yet, since Lesson 7 only offered that as an OPTIONAL idea. Today it becomes required - you're adding it for real, if you haven't already." [Timing checkpoint: wrap by 0:35]</a:t>
             </a:r>
             <a:endParaRPr lang="en-US" dirty="0"/>
           </a:p>
@@ -2956,7 +3180,7 @@
       </p:sp>
       <p:sp>
         <p:nvSpPr>
-          <p:cNvPr id="19" name="Text 11"/>
+          <p:cNvPr id="20" name="Text 11"/>
           <p:cNvSpPr/>
           <p:nvPr/>
         </p:nvSpPr>
@@ -2995,7 +3219,7 @@
       </p:sp>
       <p:sp>
         <p:nvSpPr>
-          <p:cNvPr id="20" name="Text 12"/>
+          <p:cNvPr id="21" name="Text 12"/>
           <p:cNvSpPr/>
           <p:nvPr/>
         </p:nvSpPr>
@@ -3034,7 +3258,7 @@
       </p:sp>
       <p:sp>
         <p:nvSpPr>
-          <p:cNvPr id="21" name="Text 13"/>
+          <p:cNvPr id="22" name="Text 13"/>
           <p:cNvSpPr/>
           <p:nvPr/>
         </p:nvSpPr>
@@ -4098,7 +4322,7 @@
       </p:sp>
       <p:sp>
         <p:nvSpPr>
-          <p:cNvPr id="22" name="Text 18"/>
+          <p:cNvPr id="23" name="Text 18"/>
           <p:cNvSpPr/>
           <p:nvPr/>
         </p:nvSpPr>
@@ -4137,7 +4361,7 @@
       </p:sp>
       <p:sp>
         <p:nvSpPr>
-          <p:cNvPr id="23" name="Text 19"/>
+          <p:cNvPr id="24" name="Text 19"/>
           <p:cNvSpPr/>
           <p:nvPr/>
         </p:nvSpPr>
@@ -4176,7 +4400,7 @@
       </p:sp>
       <p:sp>
         <p:nvSpPr>
-          <p:cNvPr id="24" name="Text 20"/>
+          <p:cNvPr id="25" name="Text 20"/>
           <p:cNvSpPr/>
           <p:nvPr/>
         </p:nvSpPr>
@@ -5645,7 +5869,7 @@
                 <a:ea typeface="Calibri" pitchFamily="34" charset="-122"/>
                 <a:cs typeface="Calibri" pitchFamily="34" charset="-120"/>
               </a:rPr>
-              <a:t>Godot, for the live lecture demo</a:t>
+              <a:t>GameMaker, for the live lecture demo</a:t>
             </a:r>
             <a:endParaRPr lang="en-US" sz="1250" dirty="0"/>
           </a:p>
@@ -7889,7 +8113,7 @@
       </p:sp>
       <p:sp>
         <p:nvSpPr>
-          <p:cNvPr id="16" name="Text 9"/>
+          <p:cNvPr id="17" name="Text 9"/>
           <p:cNvSpPr/>
           <p:nvPr/>
         </p:nvSpPr>
@@ -7928,7 +8152,7 @@
       </p:sp>
       <p:sp>
         <p:nvSpPr>
-          <p:cNvPr id="17" name="Text 10"/>
+          <p:cNvPr id="18" name="Text 10"/>
           <p:cNvSpPr/>
           <p:nvPr/>
         </p:nvSpPr>
@@ -7967,7 +8191,7 @@
       </p:sp>
       <p:sp>
         <p:nvSpPr>
-          <p:cNvPr id="18" name="Text 11"/>
+          <p:cNvPr id="19" name="Text 11"/>
           <p:cNvSpPr/>
           <p:nvPr/>
         </p:nvSpPr>
@@ -8660,7 +8884,7 @@
       </p:sp>
       <p:sp>
         <p:nvSpPr>
-          <p:cNvPr id="12" name="Text 8"/>
+          <p:cNvPr id="13" name="Text 8"/>
           <p:cNvSpPr/>
           <p:nvPr/>
         </p:nvSpPr>
@@ -8699,7 +8923,7 @@
       </p:sp>
       <p:sp>
         <p:nvSpPr>
-          <p:cNvPr id="13" name="Text 9"/>
+          <p:cNvPr id="14" name="Text 9"/>
           <p:cNvSpPr/>
           <p:nvPr/>
         </p:nvSpPr>
@@ -8738,7 +8962,7 @@
       </p:sp>
       <p:sp>
         <p:nvSpPr>
-          <p:cNvPr id="14" name="Text 10"/>
+          <p:cNvPr id="15" name="Text 10"/>
           <p:cNvSpPr/>
           <p:nvPr/>
         </p:nvSpPr>
@@ -9357,7 +9581,7 @@
                 <a:ea typeface="Calibri" pitchFamily="34" charset="-122"/>
                 <a:cs typeface="Calibri" pitchFamily="34" charset="-120"/>
               </a:rPr>
-              <a:t>Godot demo: in spawn_wave(), right after creating each enemy, set enemy.speed = 60.0 + (wave - 1) * 20.0. Wave 1 stays the same; wave 3 is noticeably faster.</a:t>
+              <a:t>GameMaker demo: in spawn_enemies(), right after creating each enemy instance, set inst.enemy_speed = 1 + (wave - 1) * 0.5. Wave 1 stays the same; wave 3 is noticeably faster.</a:t>
             </a:r>
             <a:endParaRPr lang="en-US" sz="1350" dirty="0"/>
           </a:p>
@@ -9423,7 +9647,7 @@
                 <a:ea typeface="Calibri" pitchFamily="34" charset="-122"/>
                 <a:cs typeface="Calibri" pitchFamily="34" charset="-120"/>
               </a:rPr>
-              <a:t>The enemy's OWN movement code from Lesson 4 doesn't change at all - it already reads a speed variable. Today we just started setting it differently per wave. That's good structure paying off.</a:t>
+              <a:t>That new enemy_speed variable has to actually get used: obj_enemy's Step event currently just says y += 1, so change that one line to y += enemy_speed. Notice what did NOT change: the rest of the Step event, from Lesson 4 - it already ran every frame, today we just made one number depend on the wave.</a:t>
             </a:r>
             <a:endParaRPr lang="en-US" sz="1400" dirty="0"/>
           </a:p>
@@ -9431,7 +9655,7 @@
       </p:sp>
       <p:sp>
         <p:nvSpPr>
-          <p:cNvPr id="12" name="Text 8"/>
+          <p:cNvPr id="13" name="Text 8"/>
           <p:cNvSpPr/>
           <p:nvPr/>
         </p:nvSpPr>
@@ -9470,7 +9694,7 @@
       </p:sp>
       <p:sp>
         <p:nvSpPr>
-          <p:cNvPr id="13" name="Text 9"/>
+          <p:cNvPr id="14" name="Text 9"/>
           <p:cNvSpPr/>
           <p:nvPr/>
         </p:nvSpPr>
@@ -9509,7 +9733,7 @@
       </p:sp>
       <p:sp>
         <p:nvSpPr>
-          <p:cNvPr id="14" name="Text 10"/>
+          <p:cNvPr id="15" name="Text 10"/>
           <p:cNvSpPr/>
           <p:nvPr/>
         </p:nvSpPr>
